--- a/AI知识介绍.pptx
+++ b/AI知识介绍.pptx
@@ -16535,13 +16535,13 @@
             <a:pPr>
               <a:defRPr sz="1120" b="0">
                 <a:solidFill>
-                  <a:srgbClr val="667085"/>
-                </a:solidFill>
-                <a:latin typeface="Microsoft YaHei"/>
-              </a:defRPr>
-            </a:pPr>
-            <a:r>
-              <a:t>AI、ML、DL、GenAI、Agent的关系</a:t>
+                  <a:srgbClr val="555555"/>
+                </a:solidFill>
+                <a:latin typeface="Microsoft YaHei"/>
+              </a:defRPr>
+            </a:pPr>
+            <a:r>
+              <a:t>AI、ML、DL、GenAI、Agent的关系 (补充解析见页底)</a:t>
             </a:r>
           </a:p>
         </p:txBody>
@@ -17568,6 +17568,213 @@
             </a:pPr>
             <a:r>
               <a:t>2</a:t>
+            </a:r>
+          </a:p>
+        </p:txBody>
+      </p:sp>
+      <p:sp>
+        <p:nvSpPr>
+          <p:cNvPr id="38" name="Rounded Rectangle 37"/>
+          <p:cNvSpPr/>
+          <p:nvPr/>
+        </p:nvSpPr>
+        <p:spPr>
+          <a:xfrm>
+            <a:off x="685800" y="5440680"/>
+            <a:ext cx="10744200" cy="914400"/>
+          </a:xfrm>
+          <a:prstGeom prst="roundRect">
+            <a:avLst/>
+          </a:prstGeom>
+          <a:solidFill>
+            <a:srgbClr val="FFFFFF"/>
+          </a:solidFill>
+          <a:ln w="12700">
+            <a:solidFill>
+              <a:srgbClr val="E4E8F0"/>
+            </a:solidFill>
+          </a:ln>
+        </p:spPr>
+        <p:style>
+          <a:lnRef idx="1">
+            <a:schemeClr val="accent1"/>
+          </a:lnRef>
+          <a:fillRef idx="3">
+            <a:schemeClr val="accent1"/>
+          </a:fillRef>
+          <a:effectRef idx="2">
+            <a:schemeClr val="accent1"/>
+          </a:effectRef>
+          <a:fontRef idx="minor">
+            <a:schemeClr val="lt1"/>
+          </a:fontRef>
+        </p:style>
+        <p:txBody>
+          <a:bodyPr rtlCol="0" anchor="ctr" wrap="square"/>
+          <a:lstStyle/>
+          <a:p>
+            <a:pPr algn="ctr"/>
+          </a:p>
+        </p:txBody>
+      </p:sp>
+      <p:sp>
+        <p:nvSpPr>
+          <p:cNvPr id="39" name="TextBox 38"/>
+          <p:cNvSpPr txBox="1"/>
+          <p:nvPr/>
+        </p:nvSpPr>
+        <p:spPr>
+          <a:xfrm>
+            <a:off x="868680" y="5504688"/>
+            <a:ext cx="1188720" cy="777240"/>
+          </a:xfrm>
+          <a:prstGeom prst="rect">
+            <a:avLst/>
+          </a:prstGeom>
+          <a:noFill/>
+        </p:spPr>
+        <p:txBody>
+          <a:bodyPr wrap="square" lIns="0" rIns="0" tIns="0" bIns="0">
+            <a:spAutoFit/>
+          </a:bodyPr>
+          <a:lstStyle/>
+          <a:p>
+            <a:pPr>
+              <a:defRPr sz="1200" b="1">
+                <a:solidFill>
+                  <a:srgbClr val="12233E"/>
+                </a:solidFill>
+                <a:latin typeface="Microsoft YaHei"/>
+              </a:defRPr>
+            </a:pPr>
+            <a:r>
+              <a:t>名词解析</a:t>
+            </a:r>
+          </a:p>
+          <a:p>
+            <a:pPr>
+              <a:spcBef>
+                <a:spcPts val="200"/>
+              </a:spcBef>
+              <a:defRPr sz="950">
+                <a:solidFill>
+                  <a:srgbClr val="7F8C8D"/>
+                </a:solidFill>
+                <a:latin typeface="Microsoft YaHei"/>
+              </a:defRPr>
+            </a:pPr>
+            <a:r>
+              <a:t>ML与DL</a:t>
+            </a:r>
+          </a:p>
+        </p:txBody>
+      </p:sp>
+      <p:sp>
+        <p:nvSpPr>
+          <p:cNvPr id="40" name="TextBox 39"/>
+          <p:cNvSpPr txBox="1"/>
+          <p:nvPr/>
+        </p:nvSpPr>
+        <p:spPr>
+          <a:xfrm>
+            <a:off x="2194560" y="5504688"/>
+            <a:ext cx="4389120" cy="777240"/>
+          </a:xfrm>
+          <a:prstGeom prst="rect">
+            <a:avLst/>
+          </a:prstGeom>
+          <a:noFill/>
+        </p:spPr>
+        <p:txBody>
+          <a:bodyPr wrap="square" lIns="0" rIns="0" tIns="0" bIns="0">
+            <a:spAutoFit/>
+          </a:bodyPr>
+          <a:lstStyle/>
+          <a:p>
+            <a:pPr>
+              <a:defRPr sz="1100" b="1">
+                <a:solidFill>
+                  <a:srgbClr val="12233E"/>
+                </a:solidFill>
+                <a:latin typeface="Microsoft YaHei"/>
+              </a:defRPr>
+            </a:pPr>
+            <a:r>
+              <a:t>机器学习 (Machine Learning, ML)</a:t>
+            </a:r>
+          </a:p>
+          <a:p>
+            <a:pPr>
+              <a:lnSpc>
+                <a:spcPct val="115000"/>
+              </a:lnSpc>
+              <a:spcBef>
+                <a:spcPts val="300"/>
+              </a:spcBef>
+              <a:defRPr sz="900">
+                <a:solidFill>
+                  <a:srgbClr val="555555"/>
+                </a:solidFill>
+                <a:latin typeface="Microsoft YaHei"/>
+              </a:defRPr>
+            </a:pPr>
+            <a:r>
+              <a:t>AI的子集。无需程序员人工编写硬编码规则，而是让机器从历史数据中自动寻找、学习规律并建立预测模型，常用于传统的分类、预测、评分和推荐场景。</a:t>
+            </a:r>
+          </a:p>
+        </p:txBody>
+      </p:sp>
+      <p:sp>
+        <p:nvSpPr>
+          <p:cNvPr id="41" name="TextBox 40"/>
+          <p:cNvSpPr txBox="1"/>
+          <p:nvPr/>
+        </p:nvSpPr>
+        <p:spPr>
+          <a:xfrm>
+            <a:off x="6766560" y="5504688"/>
+            <a:ext cx="4389120" cy="777240"/>
+          </a:xfrm>
+          <a:prstGeom prst="rect">
+            <a:avLst/>
+          </a:prstGeom>
+          <a:noFill/>
+        </p:spPr>
+        <p:txBody>
+          <a:bodyPr wrap="square" lIns="0" rIns="0" tIns="0" bIns="0">
+            <a:spAutoFit/>
+          </a:bodyPr>
+          <a:lstStyle/>
+          <a:p>
+            <a:pPr>
+              <a:defRPr sz="1100" b="1">
+                <a:solidFill>
+                  <a:srgbClr val="12233E"/>
+                </a:solidFill>
+                <a:latin typeface="Microsoft YaHei"/>
+              </a:defRPr>
+            </a:pPr>
+            <a:r>
+              <a:t>深度学习 (Deep Learning, DL)</a:t>
+            </a:r>
+          </a:p>
+          <a:p>
+            <a:pPr>
+              <a:lnSpc>
+                <a:spcPct val="115000"/>
+              </a:lnSpc>
+              <a:spcBef>
+                <a:spcPts val="300"/>
+              </a:spcBef>
+              <a:defRPr sz="900">
+                <a:solidFill>
+                  <a:srgbClr val="555555"/>
+                </a:solidFill>
+                <a:latin typeface="Microsoft YaHei"/>
+              </a:defRPr>
+            </a:pPr>
+            <a:r>
+              <a:t>ML的子集，大模型与生成式AI的基石。通过构建多层神经网络模拟人脑，自动提取高维复杂的特征，从而能够高效理解与生成图像、语音及自然语言等超大型非结构化数据。</a:t>
             </a:r>
           </a:p>
         </p:txBody>

--- a/AI知识介绍.pptx
+++ b/AI知识介绍.pptx
@@ -29,7 +29,11 @@
     <p:sldId id="273" r:id="rId23"/>
     <p:sldId id="274" r:id="rId24"/>
     <p:sldId id="276" r:id="rId25"/>
-    <p:sldId id="277" r:id="rId26"/>
+    <p:sldId id="282" r:id="rId26"/>
+    <p:sldId id="283" r:id="rId27"/>
+    <p:sldId id="284" r:id="rId28"/>
+    <p:sldId id="285" r:id="rId29"/>
+    <p:sldId id="277" r:id="rId30"/>
   </p:sldIdLst>
   <p:sldSz cx="12192000" cy="6858000"/>
   <p:notesSz cx="6858000" cy="9144000"/>
@@ -326,7 +330,7 @@
           <a:p>
             <a:fld id="{5BCAD085-E8A6-8845-BD4E-CB4CCA059FC4}" type="datetimeFigureOut">
               <a:rPr lang="en-US" smtClean="0"/>
-              <a:t>6/30/26</a:t>
+              <a:t>7/17/26</a:t>
             </a:fld>
             <a:endParaRPr lang="en-US"/>
           </a:p>
@@ -494,7 +498,7 @@
           <a:p>
             <a:fld id="{5BCAD085-E8A6-8845-BD4E-CB4CCA059FC4}" type="datetimeFigureOut">
               <a:rPr lang="en-US" smtClean="0"/>
-              <a:t>6/30/26</a:t>
+              <a:t>7/17/26</a:t>
             </a:fld>
             <a:endParaRPr lang="en-US"/>
           </a:p>
@@ -672,7 +676,7 @@
           <a:p>
             <a:fld id="{5BCAD085-E8A6-8845-BD4E-CB4CCA059FC4}" type="datetimeFigureOut">
               <a:rPr lang="en-US" smtClean="0"/>
-              <a:t>6/30/26</a:t>
+              <a:t>7/17/26</a:t>
             </a:fld>
             <a:endParaRPr lang="en-US"/>
           </a:p>
@@ -840,7 +844,7 @@
           <a:p>
             <a:fld id="{5BCAD085-E8A6-8845-BD4E-CB4CCA059FC4}" type="datetimeFigureOut">
               <a:rPr lang="en-US" smtClean="0"/>
-              <a:t>6/30/26</a:t>
+              <a:t>7/17/26</a:t>
             </a:fld>
             <a:endParaRPr lang="en-US"/>
           </a:p>
@@ -1085,7 +1089,7 @@
           <a:p>
             <a:fld id="{5BCAD085-E8A6-8845-BD4E-CB4CCA059FC4}" type="datetimeFigureOut">
               <a:rPr lang="en-US" smtClean="0"/>
-              <a:t>6/30/26</a:t>
+              <a:t>7/17/26</a:t>
             </a:fld>
             <a:endParaRPr lang="en-US"/>
           </a:p>
@@ -1370,7 +1374,7 @@
           <a:p>
             <a:fld id="{5BCAD085-E8A6-8845-BD4E-CB4CCA059FC4}" type="datetimeFigureOut">
               <a:rPr lang="en-US" smtClean="0"/>
-              <a:t>6/30/26</a:t>
+              <a:t>7/17/26</a:t>
             </a:fld>
             <a:endParaRPr lang="en-US"/>
           </a:p>
@@ -1789,7 +1793,7 @@
           <a:p>
             <a:fld id="{5BCAD085-E8A6-8845-BD4E-CB4CCA059FC4}" type="datetimeFigureOut">
               <a:rPr lang="en-US" smtClean="0"/>
-              <a:t>6/30/26</a:t>
+              <a:t>7/17/26</a:t>
             </a:fld>
             <a:endParaRPr lang="en-US"/>
           </a:p>
@@ -1906,7 +1910,7 @@
           <a:p>
             <a:fld id="{5BCAD085-E8A6-8845-BD4E-CB4CCA059FC4}" type="datetimeFigureOut">
               <a:rPr lang="en-US" smtClean="0"/>
-              <a:t>6/30/26</a:t>
+              <a:t>7/17/26</a:t>
             </a:fld>
             <a:endParaRPr lang="en-US"/>
           </a:p>
@@ -2001,7 +2005,7 @@
           <a:p>
             <a:fld id="{5BCAD085-E8A6-8845-BD4E-CB4CCA059FC4}" type="datetimeFigureOut">
               <a:rPr lang="en-US" smtClean="0"/>
-              <a:t>6/30/26</a:t>
+              <a:t>7/17/26</a:t>
             </a:fld>
             <a:endParaRPr lang="en-US"/>
           </a:p>
@@ -2276,7 +2280,7 @@
           <a:p>
             <a:fld id="{5BCAD085-E8A6-8845-BD4E-CB4CCA059FC4}" type="datetimeFigureOut">
               <a:rPr lang="en-US" smtClean="0"/>
-              <a:t>6/30/26</a:t>
+              <a:t>7/17/26</a:t>
             </a:fld>
             <a:endParaRPr lang="en-US"/>
           </a:p>
@@ -2528,7 +2532,7 @@
           <a:p>
             <a:fld id="{5BCAD085-E8A6-8845-BD4E-CB4CCA059FC4}" type="datetimeFigureOut">
               <a:rPr lang="en-US" smtClean="0"/>
-              <a:t>6/30/26</a:t>
+              <a:t>7/17/26</a:t>
             </a:fld>
             <a:endParaRPr lang="en-US"/>
           </a:p>
@@ -2739,7 +2743,7 @@
           <a:p>
             <a:fld id="{5BCAD085-E8A6-8845-BD4E-CB4CCA059FC4}" type="datetimeFigureOut">
               <a:rPr lang="en-US" smtClean="0"/>
-              <a:t>6/30/26</a:t>
+              <a:t>7/17/26</a:t>
             </a:fld>
             <a:endParaRPr lang="en-US"/>
           </a:p>
@@ -17610,10 +17614,11 @@
           </a:fontRef>
         </p:style>
         <p:txBody>
-          <a:bodyPr rtlCol="0" anchor="ctr" wrap="square"/>
+          <a:bodyPr wrap="square" rtlCol="0" anchor="ctr"/>
           <a:lstStyle/>
           <a:p>
             <a:pPr algn="ctr"/>
+            <a:endParaRPr/>
           </a:p>
         </p:txBody>
       </p:sp>
@@ -17634,7 +17639,7 @@
           <a:noFill/>
         </p:spPr>
         <p:txBody>
-          <a:bodyPr wrap="square" lIns="0" rIns="0" tIns="0" bIns="0">
+          <a:bodyPr wrap="square" lIns="0" tIns="0" rIns="0" bIns="0">
             <a:spAutoFit/>
           </a:bodyPr>
           <a:lstStyle/>
@@ -17686,7 +17691,7 @@
           <a:noFill/>
         </p:spPr>
         <p:txBody>
-          <a:bodyPr wrap="square" lIns="0" rIns="0" tIns="0" bIns="0">
+          <a:bodyPr wrap="square" lIns="0" tIns="0" rIns="0" bIns="0">
             <a:spAutoFit/>
           </a:bodyPr>
           <a:lstStyle/>
@@ -17741,7 +17746,7 @@
           <a:noFill/>
         </p:spPr>
         <p:txBody>
-          <a:bodyPr wrap="square" lIns="0" rIns="0" tIns="0" bIns="0">
+          <a:bodyPr wrap="square" lIns="0" tIns="0" rIns="0" bIns="0">
             <a:spAutoFit/>
           </a:bodyPr>
           <a:lstStyle/>
@@ -24919,6 +24924,1077 @@
 <file path=ppt/slides/slide25.xml><?xml version="1.0" encoding="utf-8"?>
 <p:sld xmlns:a="http://schemas.openxmlformats.org/drawingml/2006/main" xmlns:r="http://schemas.openxmlformats.org/officeDocument/2006/relationships" xmlns:p="http://schemas.openxmlformats.org/presentationml/2006/main">
   <p:cSld>
+    <p:bg>
+      <p:bgPr>
+        <a:solidFill>
+          <a:schemeClr val="bg1"/>
+        </a:solidFill>
+        <a:effectLst/>
+      </p:bgPr>
+    </p:bg>
+    <p:spTree>
+      <p:nvGrpSpPr>
+        <p:cNvPr id="1" name=""/>
+        <p:cNvGrpSpPr/>
+        <p:nvPr/>
+      </p:nvGrpSpPr>
+      <p:grpSpPr>
+        <a:xfrm>
+          <a:off x="0" y="0"/>
+          <a:ext cx="0" cy="0"/>
+          <a:chOff x="0" y="0"/>
+          <a:chExt cx="0" cy="0"/>
+        </a:xfrm>
+      </p:grpSpPr>
+      <p:sp>
+        <p:nvSpPr>
+          <p:cNvPr id="1031" name="Rectangle 1030">
+            <a:extLst>
+              <a:ext uri="{FF2B5EF4-FFF2-40B4-BE49-F238E27FC236}">
+                <a16:creationId xmlns:a16="http://schemas.microsoft.com/office/drawing/2014/main" id="{A9F529C3-C941-49FD-8C67-82F134F64BDB}"/>
+              </a:ext>
+              <a:ext uri="{C183D7F6-B498-43B3-948B-1728B52AA6E4}">
+                <adec:decorative xmlns:adec="http://schemas.microsoft.com/office/drawing/2017/decorative" val="1"/>
+              </a:ext>
+            </a:extLst>
+          </p:cNvPr>
+          <p:cNvSpPr>
+            <a:spLocks noGrp="1" noRot="1" noChangeAspect="1" noMove="1" noResize="1" noEditPoints="1" noAdjustHandles="1" noChangeArrowheads="1" noChangeShapeType="1" noTextEdit="1"/>
+          </p:cNvSpPr>
+          <p:nvPr>
+            <p:extLst>
+              <p:ext uri="{386F3935-93C4-4BCD-93E2-E3B085C9AB24}">
+                <p16:designElem xmlns:p16="http://schemas.microsoft.com/office/powerpoint/2015/main" val="1"/>
+              </p:ext>
+            </p:extLst>
+          </p:nvPr>
+        </p:nvSpPr>
+        <p:spPr>
+          <a:xfrm>
+            <a:off x="0" y="0"/>
+            <a:ext cx="12192000" cy="6858000"/>
+          </a:xfrm>
+          <a:prstGeom prst="rect">
+            <a:avLst/>
+          </a:prstGeom>
+          <a:solidFill>
+            <a:schemeClr val="tx1">
+              <a:lumMod val="50000"/>
+              <a:lumOff val="50000"/>
+              <a:alpha val="30000"/>
+            </a:schemeClr>
+          </a:solidFill>
+          <a:ln>
+            <a:noFill/>
+          </a:ln>
+        </p:spPr>
+        <p:style>
+          <a:lnRef idx="2">
+            <a:schemeClr val="accent1">
+              <a:shade val="50000"/>
+            </a:schemeClr>
+          </a:lnRef>
+          <a:fillRef idx="1">
+            <a:schemeClr val="accent1"/>
+          </a:fillRef>
+          <a:effectRef idx="0">
+            <a:schemeClr val="accent1"/>
+          </a:effectRef>
+          <a:fontRef idx="minor">
+            <a:schemeClr val="lt1"/>
+          </a:fontRef>
+        </p:style>
+        <p:txBody>
+          <a:bodyPr rtlCol="0" anchor="ctr"/>
+          <a:lstStyle/>
+          <a:p>
+            <a:pPr algn="ctr"/>
+            <a:endParaRPr lang="en-US"/>
+          </a:p>
+        </p:txBody>
+      </p:sp>
+      <p:sp>
+        <p:nvSpPr>
+          <p:cNvPr id="1033" name="Rectangle 1032">
+            <a:extLst>
+              <a:ext uri="{FF2B5EF4-FFF2-40B4-BE49-F238E27FC236}">
+                <a16:creationId xmlns:a16="http://schemas.microsoft.com/office/drawing/2014/main" id="{20586029-32A0-47E5-9AEC-AE3ABA6B94D0}"/>
+              </a:ext>
+              <a:ext uri="{C183D7F6-B498-43B3-948B-1728B52AA6E4}">
+                <adec:decorative xmlns:adec="http://schemas.microsoft.com/office/drawing/2017/decorative" val="1"/>
+              </a:ext>
+            </a:extLst>
+          </p:cNvPr>
+          <p:cNvSpPr>
+            <a:spLocks noGrp="1" noRot="1" noChangeAspect="1" noMove="1" noResize="1" noEditPoints="1" noAdjustHandles="1" noChangeArrowheads="1" noChangeShapeType="1" noTextEdit="1"/>
+          </p:cNvSpPr>
+          <p:nvPr>
+            <p:extLst>
+              <p:ext uri="{386F3935-93C4-4BCD-93E2-E3B085C9AB24}">
+                <p16:designElem xmlns:p16="http://schemas.microsoft.com/office/powerpoint/2015/main" val="1"/>
+              </p:ext>
+            </p:extLst>
+          </p:nvPr>
+        </p:nvSpPr>
+        <p:spPr>
+          <a:xfrm>
+            <a:off x="477012" y="480060"/>
+            <a:ext cx="11237976" cy="5897880"/>
+          </a:xfrm>
+          <a:prstGeom prst="rect">
+            <a:avLst/>
+          </a:prstGeom>
+          <a:solidFill>
+            <a:srgbClr val="FFFFFF"/>
+          </a:solidFill>
+          <a:ln w="9525">
+            <a:noFill/>
+          </a:ln>
+          <a:effectLst>
+            <a:outerShdw blurRad="63500" dist="17780" dir="5400000" algn="t" rotWithShape="0">
+              <a:prstClr val="black">
+                <a:alpha val="43000"/>
+              </a:prstClr>
+            </a:outerShdw>
+          </a:effectLst>
+        </p:spPr>
+        <p:style>
+          <a:lnRef idx="2">
+            <a:schemeClr val="accent1">
+              <a:shade val="50000"/>
+            </a:schemeClr>
+          </a:lnRef>
+          <a:fillRef idx="1">
+            <a:schemeClr val="accent1"/>
+          </a:fillRef>
+          <a:effectRef idx="0">
+            <a:schemeClr val="accent1"/>
+          </a:effectRef>
+          <a:fontRef idx="minor">
+            <a:schemeClr val="lt1"/>
+          </a:fontRef>
+        </p:style>
+        <p:txBody>
+          <a:bodyPr rtlCol="0" anchor="ctr"/>
+          <a:lstStyle/>
+          <a:p>
+            <a:pPr algn="ctr"/>
+            <a:endParaRPr lang="en-US"/>
+          </a:p>
+        </p:txBody>
+      </p:sp>
+      <p:pic>
+        <p:nvPicPr>
+          <p:cNvPr id="3" name="图片 2" descr="图示, 文本&#10;&#10;AI 生成的内容可能不正确。">
+            <a:extLst>
+              <a:ext uri="{FF2B5EF4-FFF2-40B4-BE49-F238E27FC236}">
+                <a16:creationId xmlns:a16="http://schemas.microsoft.com/office/drawing/2014/main" id="{B485946C-37A3-A405-CE3C-F4FB91F9D30C}"/>
+              </a:ext>
+            </a:extLst>
+          </p:cNvPr>
+          <p:cNvPicPr>
+            <a:picLocks noChangeAspect="1"/>
+          </p:cNvPicPr>
+          <p:nvPr/>
+        </p:nvPicPr>
+        <p:blipFill>
+          <a:blip r:embed="rId2"/>
+          <a:stretch>
+            <a:fillRect/>
+          </a:stretch>
+        </p:blipFill>
+        <p:spPr>
+          <a:xfrm>
+            <a:off x="1125073" y="643466"/>
+            <a:ext cx="4331503" cy="5571066"/>
+          </a:xfrm>
+          <a:prstGeom prst="rect">
+            <a:avLst/>
+          </a:prstGeom>
+        </p:spPr>
+      </p:pic>
+      <p:cxnSp>
+        <p:nvCxnSpPr>
+          <p:cNvPr id="1035" name="Straight Connector 1034">
+            <a:extLst>
+              <a:ext uri="{FF2B5EF4-FFF2-40B4-BE49-F238E27FC236}">
+                <a16:creationId xmlns:a16="http://schemas.microsoft.com/office/drawing/2014/main" id="{8C730EAB-A532-4295-A302-FB4B90DB9F5E}"/>
+              </a:ext>
+              <a:ext uri="{C183D7F6-B498-43B3-948B-1728B52AA6E4}">
+                <adec:decorative xmlns:adec="http://schemas.microsoft.com/office/drawing/2017/decorative" val="1"/>
+              </a:ext>
+            </a:extLst>
+          </p:cNvPr>
+          <p:cNvCxnSpPr>
+            <a:cxnSpLocks noGrp="1" noRot="1" noChangeAspect="1" noMove="1" noResize="1" noEditPoints="1" noAdjustHandles="1" noChangeArrowheads="1" noChangeShapeType="1"/>
+          </p:cNvCxnSpPr>
+          <p:nvPr>
+            <p:extLst>
+              <p:ext uri="{386F3935-93C4-4BCD-93E2-E3B085C9AB24}">
+                <p16:designElem xmlns:p16="http://schemas.microsoft.com/office/powerpoint/2015/main" val="1"/>
+              </p:ext>
+            </p:extLst>
+          </p:nvPr>
+        </p:nvCxnSpPr>
+        <p:spPr>
+          <a:xfrm>
+            <a:off x="6079958" y="1143000"/>
+            <a:ext cx="0" cy="4572000"/>
+          </a:xfrm>
+          <a:prstGeom prst="line">
+            <a:avLst/>
+          </a:prstGeom>
+          <a:ln>
+            <a:solidFill>
+              <a:srgbClr val="4E4E4E"/>
+            </a:solidFill>
+          </a:ln>
+        </p:spPr>
+        <p:style>
+          <a:lnRef idx="1">
+            <a:schemeClr val="accent1"/>
+          </a:lnRef>
+          <a:fillRef idx="0">
+            <a:schemeClr val="accent1"/>
+          </a:fillRef>
+          <a:effectRef idx="0">
+            <a:schemeClr val="accent1"/>
+          </a:effectRef>
+          <a:fontRef idx="minor">
+            <a:schemeClr val="tx1"/>
+          </a:fontRef>
+        </p:style>
+      </p:cxnSp>
+      <p:pic>
+        <p:nvPicPr>
+          <p:cNvPr id="1026" name="Picture 2">
+            <a:extLst>
+              <a:ext uri="{FF2B5EF4-FFF2-40B4-BE49-F238E27FC236}">
+                <a16:creationId xmlns:a16="http://schemas.microsoft.com/office/drawing/2014/main" id="{0ACF7FB0-FBCA-56E9-684C-FFD621A1AB90}"/>
+              </a:ext>
+            </a:extLst>
+          </p:cNvPr>
+          <p:cNvPicPr>
+            <a:picLocks noChangeAspect="1" noChangeArrowheads="1"/>
+          </p:cNvPicPr>
+          <p:nvPr/>
+        </p:nvPicPr>
+        <p:blipFill>
+          <a:blip r:embed="rId3">
+            <a:extLst>
+              <a:ext uri="{28A0092B-C50C-407E-A947-70E740481C1C}">
+                <a14:useLocalDpi xmlns:a14="http://schemas.microsoft.com/office/drawing/2010/main" val="0"/>
+              </a:ext>
+            </a:extLst>
+          </a:blip>
+          <a:stretch>
+            <a:fillRect/>
+          </a:stretch>
+        </p:blipFill>
+        <p:spPr bwMode="auto">
+          <a:xfrm>
+            <a:off x="6735423" y="643467"/>
+            <a:ext cx="4331503" cy="5571066"/>
+          </a:xfrm>
+          <a:prstGeom prst="rect">
+            <a:avLst/>
+          </a:prstGeom>
+          <a:noFill/>
+          <a:extLst>
+            <a:ext uri="{909E8E84-426E-40DD-AFC4-6F175D3DCCD1}">
+              <a14:hiddenFill xmlns:a14="http://schemas.microsoft.com/office/drawing/2010/main">
+                <a:solidFill>
+                  <a:srgbClr val="FFFFFF"/>
+                </a:solidFill>
+              </a14:hiddenFill>
+            </a:ext>
+          </a:extLst>
+        </p:spPr>
+      </p:pic>
+    </p:spTree>
+    <p:extLst>
+      <p:ext uri="{BB962C8B-B14F-4D97-AF65-F5344CB8AC3E}">
+        <p14:creationId xmlns:p14="http://schemas.microsoft.com/office/powerpoint/2010/main" val="26466025"/>
+      </p:ext>
+    </p:extLst>
+  </p:cSld>
+  <p:clrMapOvr>
+    <a:masterClrMapping/>
+  </p:clrMapOvr>
+</p:sld>
+</file>
+
+<file path=ppt/slides/slide26.xml><?xml version="1.0" encoding="utf-8"?>
+<p:sld xmlns:a="http://schemas.openxmlformats.org/drawingml/2006/main" xmlns:r="http://schemas.openxmlformats.org/officeDocument/2006/relationships" xmlns:p="http://schemas.openxmlformats.org/presentationml/2006/main">
+  <p:cSld>
+    <p:bg>
+      <p:bgPr>
+        <a:solidFill>
+          <a:schemeClr val="bg1"/>
+        </a:solidFill>
+        <a:effectLst/>
+      </p:bgPr>
+    </p:bg>
+    <p:spTree>
+      <p:nvGrpSpPr>
+        <p:cNvPr id="1" name=""/>
+        <p:cNvGrpSpPr/>
+        <p:nvPr/>
+      </p:nvGrpSpPr>
+      <p:grpSpPr>
+        <a:xfrm>
+          <a:off x="0" y="0"/>
+          <a:ext cx="0" cy="0"/>
+          <a:chOff x="0" y="0"/>
+          <a:chExt cx="0" cy="0"/>
+        </a:xfrm>
+      </p:grpSpPr>
+      <p:sp>
+        <p:nvSpPr>
+          <p:cNvPr id="2057" name="Rectangle 2056">
+            <a:extLst>
+              <a:ext uri="{FF2B5EF4-FFF2-40B4-BE49-F238E27FC236}">
+                <a16:creationId xmlns:a16="http://schemas.microsoft.com/office/drawing/2014/main" id="{A9F529C3-C941-49FD-8C67-82F134F64BDB}"/>
+              </a:ext>
+              <a:ext uri="{C183D7F6-B498-43B3-948B-1728B52AA6E4}">
+                <adec:decorative xmlns:adec="http://schemas.microsoft.com/office/drawing/2017/decorative" val="1"/>
+              </a:ext>
+            </a:extLst>
+          </p:cNvPr>
+          <p:cNvSpPr>
+            <a:spLocks noGrp="1" noRot="1" noChangeAspect="1" noMove="1" noResize="1" noEditPoints="1" noAdjustHandles="1" noChangeArrowheads="1" noChangeShapeType="1" noTextEdit="1"/>
+          </p:cNvSpPr>
+          <p:nvPr>
+            <p:extLst>
+              <p:ext uri="{386F3935-93C4-4BCD-93E2-E3B085C9AB24}">
+                <p16:designElem xmlns:p16="http://schemas.microsoft.com/office/powerpoint/2015/main" val="1"/>
+              </p:ext>
+            </p:extLst>
+          </p:nvPr>
+        </p:nvSpPr>
+        <p:spPr>
+          <a:xfrm>
+            <a:off x="0" y="0"/>
+            <a:ext cx="12192000" cy="6858000"/>
+          </a:xfrm>
+          <a:prstGeom prst="rect">
+            <a:avLst/>
+          </a:prstGeom>
+          <a:solidFill>
+            <a:schemeClr val="tx1">
+              <a:lumMod val="50000"/>
+              <a:lumOff val="50000"/>
+              <a:alpha val="30000"/>
+            </a:schemeClr>
+          </a:solidFill>
+          <a:ln>
+            <a:noFill/>
+          </a:ln>
+        </p:spPr>
+        <p:style>
+          <a:lnRef idx="2">
+            <a:schemeClr val="accent1">
+              <a:shade val="50000"/>
+            </a:schemeClr>
+          </a:lnRef>
+          <a:fillRef idx="1">
+            <a:schemeClr val="accent1"/>
+          </a:fillRef>
+          <a:effectRef idx="0">
+            <a:schemeClr val="accent1"/>
+          </a:effectRef>
+          <a:fontRef idx="minor">
+            <a:schemeClr val="lt1"/>
+          </a:fontRef>
+        </p:style>
+        <p:txBody>
+          <a:bodyPr rtlCol="0" anchor="ctr"/>
+          <a:lstStyle/>
+          <a:p>
+            <a:pPr algn="ctr"/>
+            <a:endParaRPr lang="en-US"/>
+          </a:p>
+        </p:txBody>
+      </p:sp>
+      <p:sp>
+        <p:nvSpPr>
+          <p:cNvPr id="2059" name="Rectangle 2058">
+            <a:extLst>
+              <a:ext uri="{FF2B5EF4-FFF2-40B4-BE49-F238E27FC236}">
+                <a16:creationId xmlns:a16="http://schemas.microsoft.com/office/drawing/2014/main" id="{20586029-32A0-47E5-9AEC-AE3ABA6B94D0}"/>
+              </a:ext>
+              <a:ext uri="{C183D7F6-B498-43B3-948B-1728B52AA6E4}">
+                <adec:decorative xmlns:adec="http://schemas.microsoft.com/office/drawing/2017/decorative" val="1"/>
+              </a:ext>
+            </a:extLst>
+          </p:cNvPr>
+          <p:cNvSpPr>
+            <a:spLocks noGrp="1" noRot="1" noChangeAspect="1" noMove="1" noResize="1" noEditPoints="1" noAdjustHandles="1" noChangeArrowheads="1" noChangeShapeType="1" noTextEdit="1"/>
+          </p:cNvSpPr>
+          <p:nvPr>
+            <p:extLst>
+              <p:ext uri="{386F3935-93C4-4BCD-93E2-E3B085C9AB24}">
+                <p16:designElem xmlns:p16="http://schemas.microsoft.com/office/powerpoint/2015/main" val="1"/>
+              </p:ext>
+            </p:extLst>
+          </p:nvPr>
+        </p:nvSpPr>
+        <p:spPr>
+          <a:xfrm>
+            <a:off x="477012" y="480060"/>
+            <a:ext cx="11237976" cy="5897880"/>
+          </a:xfrm>
+          <a:prstGeom prst="rect">
+            <a:avLst/>
+          </a:prstGeom>
+          <a:solidFill>
+            <a:srgbClr val="FFFFFF"/>
+          </a:solidFill>
+          <a:ln w="9525">
+            <a:noFill/>
+          </a:ln>
+          <a:effectLst>
+            <a:outerShdw blurRad="63500" dist="17780" dir="5400000" algn="t" rotWithShape="0">
+              <a:prstClr val="black">
+                <a:alpha val="43000"/>
+              </a:prstClr>
+            </a:outerShdw>
+          </a:effectLst>
+        </p:spPr>
+        <p:style>
+          <a:lnRef idx="2">
+            <a:schemeClr val="accent1">
+              <a:shade val="50000"/>
+            </a:schemeClr>
+          </a:lnRef>
+          <a:fillRef idx="1">
+            <a:schemeClr val="accent1"/>
+          </a:fillRef>
+          <a:effectRef idx="0">
+            <a:schemeClr val="accent1"/>
+          </a:effectRef>
+          <a:fontRef idx="minor">
+            <a:schemeClr val="lt1"/>
+          </a:fontRef>
+        </p:style>
+        <p:txBody>
+          <a:bodyPr rtlCol="0" anchor="ctr"/>
+          <a:lstStyle/>
+          <a:p>
+            <a:pPr algn="ctr"/>
+            <a:endParaRPr lang="en-US"/>
+          </a:p>
+        </p:txBody>
+      </p:sp>
+      <p:pic>
+        <p:nvPicPr>
+          <p:cNvPr id="2050" name="Picture 2">
+            <a:extLst>
+              <a:ext uri="{FF2B5EF4-FFF2-40B4-BE49-F238E27FC236}">
+                <a16:creationId xmlns:a16="http://schemas.microsoft.com/office/drawing/2014/main" id="{67DFD788-A9AC-E748-DB97-A6E2C41A68DE}"/>
+              </a:ext>
+            </a:extLst>
+          </p:cNvPr>
+          <p:cNvPicPr>
+            <a:picLocks noChangeAspect="1" noChangeArrowheads="1"/>
+          </p:cNvPicPr>
+          <p:nvPr/>
+        </p:nvPicPr>
+        <p:blipFill>
+          <a:blip r:embed="rId2">
+            <a:extLst>
+              <a:ext uri="{28A0092B-C50C-407E-A947-70E740481C1C}">
+                <a14:useLocalDpi xmlns:a14="http://schemas.microsoft.com/office/drawing/2010/main" val="0"/>
+              </a:ext>
+            </a:extLst>
+          </a:blip>
+          <a:stretch>
+            <a:fillRect/>
+          </a:stretch>
+        </p:blipFill>
+        <p:spPr bwMode="auto">
+          <a:xfrm>
+            <a:off x="1125073" y="643466"/>
+            <a:ext cx="4331503" cy="5571066"/>
+          </a:xfrm>
+          <a:prstGeom prst="rect">
+            <a:avLst/>
+          </a:prstGeom>
+          <a:noFill/>
+          <a:extLst>
+            <a:ext uri="{909E8E84-426E-40DD-AFC4-6F175D3DCCD1}">
+              <a14:hiddenFill xmlns:a14="http://schemas.microsoft.com/office/drawing/2010/main">
+                <a:solidFill>
+                  <a:srgbClr val="FFFFFF"/>
+                </a:solidFill>
+              </a14:hiddenFill>
+            </a:ext>
+          </a:extLst>
+        </p:spPr>
+      </p:pic>
+      <p:cxnSp>
+        <p:nvCxnSpPr>
+          <p:cNvPr id="2061" name="Straight Connector 2060">
+            <a:extLst>
+              <a:ext uri="{FF2B5EF4-FFF2-40B4-BE49-F238E27FC236}">
+                <a16:creationId xmlns:a16="http://schemas.microsoft.com/office/drawing/2014/main" id="{8C730EAB-A532-4295-A302-FB4B90DB9F5E}"/>
+              </a:ext>
+              <a:ext uri="{C183D7F6-B498-43B3-948B-1728B52AA6E4}">
+                <adec:decorative xmlns:adec="http://schemas.microsoft.com/office/drawing/2017/decorative" val="1"/>
+              </a:ext>
+            </a:extLst>
+          </p:cNvPr>
+          <p:cNvCxnSpPr>
+            <a:cxnSpLocks noGrp="1" noRot="1" noChangeAspect="1" noMove="1" noResize="1" noEditPoints="1" noAdjustHandles="1" noChangeArrowheads="1" noChangeShapeType="1"/>
+          </p:cNvCxnSpPr>
+          <p:nvPr>
+            <p:extLst>
+              <p:ext uri="{386F3935-93C4-4BCD-93E2-E3B085C9AB24}">
+                <p16:designElem xmlns:p16="http://schemas.microsoft.com/office/powerpoint/2015/main" val="1"/>
+              </p:ext>
+            </p:extLst>
+          </p:nvPr>
+        </p:nvCxnSpPr>
+        <p:spPr>
+          <a:xfrm>
+            <a:off x="6079958" y="1143000"/>
+            <a:ext cx="0" cy="4572000"/>
+          </a:xfrm>
+          <a:prstGeom prst="line">
+            <a:avLst/>
+          </a:prstGeom>
+          <a:ln>
+            <a:solidFill>
+              <a:srgbClr val="4E4E4E"/>
+            </a:solidFill>
+          </a:ln>
+        </p:spPr>
+        <p:style>
+          <a:lnRef idx="1">
+            <a:schemeClr val="accent1"/>
+          </a:lnRef>
+          <a:fillRef idx="0">
+            <a:schemeClr val="accent1"/>
+          </a:fillRef>
+          <a:effectRef idx="0">
+            <a:schemeClr val="accent1"/>
+          </a:effectRef>
+          <a:fontRef idx="minor">
+            <a:schemeClr val="tx1"/>
+          </a:fontRef>
+        </p:style>
+      </p:cxnSp>
+      <p:pic>
+        <p:nvPicPr>
+          <p:cNvPr id="2052" name="Picture 4">
+            <a:extLst>
+              <a:ext uri="{FF2B5EF4-FFF2-40B4-BE49-F238E27FC236}">
+                <a16:creationId xmlns:a16="http://schemas.microsoft.com/office/drawing/2014/main" id="{8E6B4835-AB41-C34F-1A5C-B0506F78D4F5}"/>
+              </a:ext>
+            </a:extLst>
+          </p:cNvPr>
+          <p:cNvPicPr>
+            <a:picLocks noChangeAspect="1" noChangeArrowheads="1"/>
+          </p:cNvPicPr>
+          <p:nvPr/>
+        </p:nvPicPr>
+        <p:blipFill>
+          <a:blip r:embed="rId3">
+            <a:extLst>
+              <a:ext uri="{28A0092B-C50C-407E-A947-70E740481C1C}">
+                <a14:useLocalDpi xmlns:a14="http://schemas.microsoft.com/office/drawing/2010/main" val="0"/>
+              </a:ext>
+            </a:extLst>
+          </a:blip>
+          <a:stretch>
+            <a:fillRect/>
+          </a:stretch>
+        </p:blipFill>
+        <p:spPr bwMode="auto">
+          <a:xfrm>
+            <a:off x="6735423" y="643467"/>
+            <a:ext cx="4331503" cy="5571066"/>
+          </a:xfrm>
+          <a:prstGeom prst="rect">
+            <a:avLst/>
+          </a:prstGeom>
+          <a:noFill/>
+          <a:extLst>
+            <a:ext uri="{909E8E84-426E-40DD-AFC4-6F175D3DCCD1}">
+              <a14:hiddenFill xmlns:a14="http://schemas.microsoft.com/office/drawing/2010/main">
+                <a:solidFill>
+                  <a:srgbClr val="FFFFFF"/>
+                </a:solidFill>
+              </a14:hiddenFill>
+            </a:ext>
+          </a:extLst>
+        </p:spPr>
+      </p:pic>
+    </p:spTree>
+    <p:extLst>
+      <p:ext uri="{BB962C8B-B14F-4D97-AF65-F5344CB8AC3E}">
+        <p14:creationId xmlns:p14="http://schemas.microsoft.com/office/powerpoint/2010/main" val="3855685190"/>
+      </p:ext>
+    </p:extLst>
+  </p:cSld>
+  <p:clrMapOvr>
+    <a:masterClrMapping/>
+  </p:clrMapOvr>
+</p:sld>
+</file>
+
+<file path=ppt/slides/slide27.xml><?xml version="1.0" encoding="utf-8"?>
+<p:sld xmlns:a="http://schemas.openxmlformats.org/drawingml/2006/main" xmlns:r="http://schemas.openxmlformats.org/officeDocument/2006/relationships" xmlns:p="http://schemas.openxmlformats.org/presentationml/2006/main">
+  <p:cSld>
+    <p:bg>
+      <p:bgPr>
+        <a:solidFill>
+          <a:schemeClr val="bg1"/>
+        </a:solidFill>
+        <a:effectLst/>
+      </p:bgPr>
+    </p:bg>
+    <p:spTree>
+      <p:nvGrpSpPr>
+        <p:cNvPr id="1" name=""/>
+        <p:cNvGrpSpPr/>
+        <p:nvPr/>
+      </p:nvGrpSpPr>
+      <p:grpSpPr>
+        <a:xfrm>
+          <a:off x="0" y="0"/>
+          <a:ext cx="0" cy="0"/>
+          <a:chOff x="0" y="0"/>
+          <a:chExt cx="0" cy="0"/>
+        </a:xfrm>
+      </p:grpSpPr>
+      <p:pic>
+        <p:nvPicPr>
+          <p:cNvPr id="4098" name="Picture 2">
+            <a:extLst>
+              <a:ext uri="{FF2B5EF4-FFF2-40B4-BE49-F238E27FC236}">
+                <a16:creationId xmlns:a16="http://schemas.microsoft.com/office/drawing/2014/main" id="{AA593236-F2C3-3824-D426-BA74595CE1E2}"/>
+              </a:ext>
+            </a:extLst>
+          </p:cNvPr>
+          <p:cNvPicPr>
+            <a:picLocks noChangeAspect="1" noChangeArrowheads="1"/>
+          </p:cNvPicPr>
+          <p:nvPr/>
+        </p:nvPicPr>
+        <p:blipFill>
+          <a:blip r:embed="rId2">
+            <a:extLst>
+              <a:ext uri="{28A0092B-C50C-407E-A947-70E740481C1C}">
+                <a14:useLocalDpi xmlns:a14="http://schemas.microsoft.com/office/drawing/2010/main" val="0"/>
+              </a:ext>
+            </a:extLst>
+          </a:blip>
+          <a:stretch>
+            <a:fillRect/>
+          </a:stretch>
+        </p:blipFill>
+        <p:spPr bwMode="auto">
+          <a:xfrm>
+            <a:off x="1123548" y="643467"/>
+            <a:ext cx="4331503" cy="5571066"/>
+          </a:xfrm>
+          <a:prstGeom prst="rect">
+            <a:avLst/>
+          </a:prstGeom>
+          <a:noFill/>
+          <a:extLst>
+            <a:ext uri="{909E8E84-426E-40DD-AFC4-6F175D3DCCD1}">
+              <a14:hiddenFill xmlns:a14="http://schemas.microsoft.com/office/drawing/2010/main">
+                <a:solidFill>
+                  <a:srgbClr val="FFFFFF"/>
+                </a:solidFill>
+              </a14:hiddenFill>
+            </a:ext>
+          </a:extLst>
+        </p:spPr>
+      </p:pic>
+      <p:pic>
+        <p:nvPicPr>
+          <p:cNvPr id="4100" name="Picture 4">
+            <a:extLst>
+              <a:ext uri="{FF2B5EF4-FFF2-40B4-BE49-F238E27FC236}">
+                <a16:creationId xmlns:a16="http://schemas.microsoft.com/office/drawing/2014/main" id="{D8363956-5F35-784B-1134-327FE6078B35}"/>
+              </a:ext>
+            </a:extLst>
+          </p:cNvPr>
+          <p:cNvPicPr>
+            <a:picLocks noChangeAspect="1" noChangeArrowheads="1"/>
+          </p:cNvPicPr>
+          <p:nvPr/>
+        </p:nvPicPr>
+        <p:blipFill>
+          <a:blip r:embed="rId3">
+            <a:extLst>
+              <a:ext uri="{28A0092B-C50C-407E-A947-70E740481C1C}">
+                <a14:useLocalDpi xmlns:a14="http://schemas.microsoft.com/office/drawing/2010/main" val="0"/>
+              </a:ext>
+            </a:extLst>
+          </a:blip>
+          <a:stretch>
+            <a:fillRect/>
+          </a:stretch>
+        </p:blipFill>
+        <p:spPr bwMode="auto">
+          <a:xfrm>
+            <a:off x="6736947" y="643467"/>
+            <a:ext cx="4331503" cy="5571066"/>
+          </a:xfrm>
+          <a:prstGeom prst="rect">
+            <a:avLst/>
+          </a:prstGeom>
+          <a:noFill/>
+          <a:extLst>
+            <a:ext uri="{909E8E84-426E-40DD-AFC4-6F175D3DCCD1}">
+              <a14:hiddenFill xmlns:a14="http://schemas.microsoft.com/office/drawing/2010/main">
+                <a:solidFill>
+                  <a:srgbClr val="FFFFFF"/>
+                </a:solidFill>
+              </a14:hiddenFill>
+            </a:ext>
+          </a:extLst>
+        </p:spPr>
+      </p:pic>
+    </p:spTree>
+    <p:extLst>
+      <p:ext uri="{BB962C8B-B14F-4D97-AF65-F5344CB8AC3E}">
+        <p14:creationId xmlns:p14="http://schemas.microsoft.com/office/powerpoint/2010/main" val="2817505344"/>
+      </p:ext>
+    </p:extLst>
+  </p:cSld>
+  <p:clrMapOvr>
+    <a:masterClrMapping/>
+  </p:clrMapOvr>
+</p:sld>
+</file>
+
+<file path=ppt/slides/slide28.xml><?xml version="1.0" encoding="utf-8"?>
+<p:sld xmlns:a="http://schemas.openxmlformats.org/drawingml/2006/main" xmlns:r="http://schemas.openxmlformats.org/officeDocument/2006/relationships" xmlns:p="http://schemas.openxmlformats.org/presentationml/2006/main">
+  <p:cSld>
+    <p:bg>
+      <p:bgPr>
+        <a:solidFill>
+          <a:schemeClr val="bg1"/>
+        </a:solidFill>
+        <a:effectLst/>
+      </p:bgPr>
+    </p:bg>
+    <p:spTree>
+      <p:nvGrpSpPr>
+        <p:cNvPr id="1" name=""/>
+        <p:cNvGrpSpPr/>
+        <p:nvPr/>
+      </p:nvGrpSpPr>
+      <p:grpSpPr>
+        <a:xfrm>
+          <a:off x="0" y="0"/>
+          <a:ext cx="0" cy="0"/>
+          <a:chOff x="0" y="0"/>
+          <a:chExt cx="0" cy="0"/>
+        </a:xfrm>
+      </p:grpSpPr>
+      <p:sp>
+        <p:nvSpPr>
+          <p:cNvPr id="5129" name="Rectangle 5128">
+            <a:extLst>
+              <a:ext uri="{FF2B5EF4-FFF2-40B4-BE49-F238E27FC236}">
+                <a16:creationId xmlns:a16="http://schemas.microsoft.com/office/drawing/2014/main" id="{A9F529C3-C941-49FD-8C67-82F134F64BDB}"/>
+              </a:ext>
+              <a:ext uri="{C183D7F6-B498-43B3-948B-1728B52AA6E4}">
+                <adec:decorative xmlns:adec="http://schemas.microsoft.com/office/drawing/2017/decorative" val="1"/>
+              </a:ext>
+            </a:extLst>
+          </p:cNvPr>
+          <p:cNvSpPr>
+            <a:spLocks noGrp="1" noRot="1" noChangeAspect="1" noMove="1" noResize="1" noEditPoints="1" noAdjustHandles="1" noChangeArrowheads="1" noChangeShapeType="1" noTextEdit="1"/>
+          </p:cNvSpPr>
+          <p:nvPr>
+            <p:extLst>
+              <p:ext uri="{386F3935-93C4-4BCD-93E2-E3B085C9AB24}">
+                <p16:designElem xmlns:p16="http://schemas.microsoft.com/office/powerpoint/2015/main" val="1"/>
+              </p:ext>
+            </p:extLst>
+          </p:nvPr>
+        </p:nvSpPr>
+        <p:spPr>
+          <a:xfrm>
+            <a:off x="0" y="0"/>
+            <a:ext cx="12192000" cy="6858000"/>
+          </a:xfrm>
+          <a:prstGeom prst="rect">
+            <a:avLst/>
+          </a:prstGeom>
+          <a:solidFill>
+            <a:schemeClr val="tx1">
+              <a:lumMod val="50000"/>
+              <a:lumOff val="50000"/>
+              <a:alpha val="30000"/>
+            </a:schemeClr>
+          </a:solidFill>
+          <a:ln>
+            <a:noFill/>
+          </a:ln>
+        </p:spPr>
+        <p:style>
+          <a:lnRef idx="2">
+            <a:schemeClr val="accent1">
+              <a:shade val="50000"/>
+            </a:schemeClr>
+          </a:lnRef>
+          <a:fillRef idx="1">
+            <a:schemeClr val="accent1"/>
+          </a:fillRef>
+          <a:effectRef idx="0">
+            <a:schemeClr val="accent1"/>
+          </a:effectRef>
+          <a:fontRef idx="minor">
+            <a:schemeClr val="lt1"/>
+          </a:fontRef>
+        </p:style>
+        <p:txBody>
+          <a:bodyPr rtlCol="0" anchor="ctr"/>
+          <a:lstStyle/>
+          <a:p>
+            <a:pPr algn="ctr"/>
+            <a:endParaRPr lang="en-US"/>
+          </a:p>
+        </p:txBody>
+      </p:sp>
+      <p:sp>
+        <p:nvSpPr>
+          <p:cNvPr id="5131" name="Rectangle 5130">
+            <a:extLst>
+              <a:ext uri="{FF2B5EF4-FFF2-40B4-BE49-F238E27FC236}">
+                <a16:creationId xmlns:a16="http://schemas.microsoft.com/office/drawing/2014/main" id="{20586029-32A0-47E5-9AEC-AE3ABA6B94D0}"/>
+              </a:ext>
+              <a:ext uri="{C183D7F6-B498-43B3-948B-1728B52AA6E4}">
+                <adec:decorative xmlns:adec="http://schemas.microsoft.com/office/drawing/2017/decorative" val="1"/>
+              </a:ext>
+            </a:extLst>
+          </p:cNvPr>
+          <p:cNvSpPr>
+            <a:spLocks noGrp="1" noRot="1" noChangeAspect="1" noMove="1" noResize="1" noEditPoints="1" noAdjustHandles="1" noChangeArrowheads="1" noChangeShapeType="1" noTextEdit="1"/>
+          </p:cNvSpPr>
+          <p:nvPr>
+            <p:extLst>
+              <p:ext uri="{386F3935-93C4-4BCD-93E2-E3B085C9AB24}">
+                <p16:designElem xmlns:p16="http://schemas.microsoft.com/office/powerpoint/2015/main" val="1"/>
+              </p:ext>
+            </p:extLst>
+          </p:nvPr>
+        </p:nvSpPr>
+        <p:spPr>
+          <a:xfrm>
+            <a:off x="477012" y="480060"/>
+            <a:ext cx="11237976" cy="5897880"/>
+          </a:xfrm>
+          <a:prstGeom prst="rect">
+            <a:avLst/>
+          </a:prstGeom>
+          <a:solidFill>
+            <a:srgbClr val="FFFFFF"/>
+          </a:solidFill>
+          <a:ln w="9525">
+            <a:noFill/>
+          </a:ln>
+          <a:effectLst>
+            <a:outerShdw blurRad="63500" dist="17780" dir="5400000" algn="t" rotWithShape="0">
+              <a:prstClr val="black">
+                <a:alpha val="43000"/>
+              </a:prstClr>
+            </a:outerShdw>
+          </a:effectLst>
+        </p:spPr>
+        <p:style>
+          <a:lnRef idx="2">
+            <a:schemeClr val="accent1">
+              <a:shade val="50000"/>
+            </a:schemeClr>
+          </a:lnRef>
+          <a:fillRef idx="1">
+            <a:schemeClr val="accent1"/>
+          </a:fillRef>
+          <a:effectRef idx="0">
+            <a:schemeClr val="accent1"/>
+          </a:effectRef>
+          <a:fontRef idx="minor">
+            <a:schemeClr val="lt1"/>
+          </a:fontRef>
+        </p:style>
+        <p:txBody>
+          <a:bodyPr rtlCol="0" anchor="ctr"/>
+          <a:lstStyle/>
+          <a:p>
+            <a:pPr algn="ctr"/>
+            <a:endParaRPr lang="en-US"/>
+          </a:p>
+        </p:txBody>
+      </p:sp>
+      <p:pic>
+        <p:nvPicPr>
+          <p:cNvPr id="5122" name="Picture 2">
+            <a:extLst>
+              <a:ext uri="{FF2B5EF4-FFF2-40B4-BE49-F238E27FC236}">
+                <a16:creationId xmlns:a16="http://schemas.microsoft.com/office/drawing/2014/main" id="{6726116A-3348-5BC9-359C-339FE9D84D13}"/>
+              </a:ext>
+            </a:extLst>
+          </p:cNvPr>
+          <p:cNvPicPr>
+            <a:picLocks noChangeAspect="1" noChangeArrowheads="1"/>
+          </p:cNvPicPr>
+          <p:nvPr/>
+        </p:nvPicPr>
+        <p:blipFill>
+          <a:blip r:embed="rId2">
+            <a:extLst>
+              <a:ext uri="{28A0092B-C50C-407E-A947-70E740481C1C}">
+                <a14:useLocalDpi xmlns:a14="http://schemas.microsoft.com/office/drawing/2010/main" val="0"/>
+              </a:ext>
+            </a:extLst>
+          </a:blip>
+          <a:stretch>
+            <a:fillRect/>
+          </a:stretch>
+        </p:blipFill>
+        <p:spPr bwMode="auto">
+          <a:xfrm>
+            <a:off x="1125073" y="643466"/>
+            <a:ext cx="4331503" cy="5571066"/>
+          </a:xfrm>
+          <a:prstGeom prst="rect">
+            <a:avLst/>
+          </a:prstGeom>
+          <a:noFill/>
+          <a:extLst>
+            <a:ext uri="{909E8E84-426E-40DD-AFC4-6F175D3DCCD1}">
+              <a14:hiddenFill xmlns:a14="http://schemas.microsoft.com/office/drawing/2010/main">
+                <a:solidFill>
+                  <a:srgbClr val="FFFFFF"/>
+                </a:solidFill>
+              </a14:hiddenFill>
+            </a:ext>
+          </a:extLst>
+        </p:spPr>
+      </p:pic>
+      <p:cxnSp>
+        <p:nvCxnSpPr>
+          <p:cNvPr id="5133" name="Straight Connector 5132">
+            <a:extLst>
+              <a:ext uri="{FF2B5EF4-FFF2-40B4-BE49-F238E27FC236}">
+                <a16:creationId xmlns:a16="http://schemas.microsoft.com/office/drawing/2014/main" id="{8C730EAB-A532-4295-A302-FB4B90DB9F5E}"/>
+              </a:ext>
+              <a:ext uri="{C183D7F6-B498-43B3-948B-1728B52AA6E4}">
+                <adec:decorative xmlns:adec="http://schemas.microsoft.com/office/drawing/2017/decorative" val="1"/>
+              </a:ext>
+            </a:extLst>
+          </p:cNvPr>
+          <p:cNvCxnSpPr>
+            <a:cxnSpLocks noGrp="1" noRot="1" noChangeAspect="1" noMove="1" noResize="1" noEditPoints="1" noAdjustHandles="1" noChangeArrowheads="1" noChangeShapeType="1"/>
+          </p:cNvCxnSpPr>
+          <p:nvPr>
+            <p:extLst>
+              <p:ext uri="{386F3935-93C4-4BCD-93E2-E3B085C9AB24}">
+                <p16:designElem xmlns:p16="http://schemas.microsoft.com/office/powerpoint/2015/main" val="1"/>
+              </p:ext>
+            </p:extLst>
+          </p:nvPr>
+        </p:nvCxnSpPr>
+        <p:spPr>
+          <a:xfrm>
+            <a:off x="6079958" y="1143000"/>
+            <a:ext cx="0" cy="4572000"/>
+          </a:xfrm>
+          <a:prstGeom prst="line">
+            <a:avLst/>
+          </a:prstGeom>
+          <a:ln>
+            <a:solidFill>
+              <a:srgbClr val="4E4E4E"/>
+            </a:solidFill>
+          </a:ln>
+        </p:spPr>
+        <p:style>
+          <a:lnRef idx="1">
+            <a:schemeClr val="accent1"/>
+          </a:lnRef>
+          <a:fillRef idx="0">
+            <a:schemeClr val="accent1"/>
+          </a:fillRef>
+          <a:effectRef idx="0">
+            <a:schemeClr val="accent1"/>
+          </a:effectRef>
+          <a:fontRef idx="minor">
+            <a:schemeClr val="tx1"/>
+          </a:fontRef>
+        </p:style>
+      </p:cxnSp>
+      <p:pic>
+        <p:nvPicPr>
+          <p:cNvPr id="5124" name="Picture 4">
+            <a:extLst>
+              <a:ext uri="{FF2B5EF4-FFF2-40B4-BE49-F238E27FC236}">
+                <a16:creationId xmlns:a16="http://schemas.microsoft.com/office/drawing/2014/main" id="{EA490BCE-E476-8552-A9CA-97488688392D}"/>
+              </a:ext>
+            </a:extLst>
+          </p:cNvPr>
+          <p:cNvPicPr>
+            <a:picLocks noChangeAspect="1" noChangeArrowheads="1"/>
+          </p:cNvPicPr>
+          <p:nvPr/>
+        </p:nvPicPr>
+        <p:blipFill>
+          <a:blip r:embed="rId3">
+            <a:extLst>
+              <a:ext uri="{28A0092B-C50C-407E-A947-70E740481C1C}">
+                <a14:useLocalDpi xmlns:a14="http://schemas.microsoft.com/office/drawing/2010/main" val="0"/>
+              </a:ext>
+            </a:extLst>
+          </a:blip>
+          <a:stretch>
+            <a:fillRect/>
+          </a:stretch>
+        </p:blipFill>
+        <p:spPr bwMode="auto">
+          <a:xfrm>
+            <a:off x="6735423" y="643467"/>
+            <a:ext cx="4331503" cy="5571066"/>
+          </a:xfrm>
+          <a:prstGeom prst="rect">
+            <a:avLst/>
+          </a:prstGeom>
+          <a:noFill/>
+          <a:extLst>
+            <a:ext uri="{909E8E84-426E-40DD-AFC4-6F175D3DCCD1}">
+              <a14:hiddenFill xmlns:a14="http://schemas.microsoft.com/office/drawing/2010/main">
+                <a:solidFill>
+                  <a:srgbClr val="FFFFFF"/>
+                </a:solidFill>
+              </a14:hiddenFill>
+            </a:ext>
+          </a:extLst>
+        </p:spPr>
+      </p:pic>
+    </p:spTree>
+    <p:extLst>
+      <p:ext uri="{BB962C8B-B14F-4D97-AF65-F5344CB8AC3E}">
+        <p14:creationId xmlns:p14="http://schemas.microsoft.com/office/powerpoint/2010/main" val="1626294726"/>
+      </p:ext>
+    </p:extLst>
+  </p:cSld>
+  <p:clrMapOvr>
+    <a:masterClrMapping/>
+  </p:clrMapOvr>
+</p:sld>
+</file>
+
+<file path=ppt/slides/slide29.xml><?xml version="1.0" encoding="utf-8"?>
+<p:sld xmlns:a="http://schemas.openxmlformats.org/drawingml/2006/main" xmlns:r="http://schemas.openxmlformats.org/officeDocument/2006/relationships" xmlns:p="http://schemas.openxmlformats.org/presentationml/2006/main">
+  <p:cSld>
     <p:spTree>
       <p:nvGrpSpPr>
         <p:cNvPr id="1" name=""/>
@@ -26136,8 +27212,10 @@
               </a:defRPr>
             </a:pPr>
             <a:r>
+              <a:rPr dirty="0" err="1"/>
               <a:t>机器学习</a:t>
             </a:r>
+            <a:endParaRPr dirty="0"/>
           </a:p>
         </p:txBody>
       </p:sp>
@@ -30416,7 +31494,32 @@
               </a:defRPr>
             </a:pPr>
             <a:r>
-              <a:t>训练像“学习考试规律”；推理像“现场答题”。企业使用大模型时多数是在推理阶段调用服务。</a:t>
+              <a:rPr dirty="0"/>
+              <a:t>训练像“</a:t>
+            </a:r>
+            <a:r>
+              <a:rPr dirty="0" err="1"/>
+              <a:t>学习考试规律</a:t>
+            </a:r>
+            <a:r>
+              <a:rPr dirty="0"/>
+              <a:t>”；推理像“</a:t>
+            </a:r>
+            <a:r>
+              <a:rPr dirty="0" err="1"/>
+              <a:t>现场答题</a:t>
+            </a:r>
+            <a:r>
+              <a:rPr dirty="0"/>
+              <a:t>”。</a:t>
+            </a:r>
+            <a:r>
+              <a:rPr dirty="0" err="1"/>
+              <a:t>企业使用大模型时多数是在推理阶段调用服务</a:t>
+            </a:r>
+            <a:r>
+              <a:rPr dirty="0"/>
+              <a:t>。</a:t>
             </a:r>
           </a:p>
         </p:txBody>
